--- a/dist/초2/수학/수와계산/초2_수학_수와계산_08_3단과6단.pptx
+++ b/dist/초2/수학/수와계산/초2_수학_수와계산_08_3단과6단.pptx
@@ -121,13 +121,13 @@
   <p:extLst>
     <p:ext uri="{521415D9-36F7-43E2-AB2F-B90AF26B5E84}">
       <p14:sectionLst xmlns:p14="http://schemas.microsoft.com/office/powerpoint/2010/main">
-        <p14:section name="도입" id="{5bf423b7-85fd-ac5b-32f2-a839fcdd2a42}">
+        <p14:section name="도입" id="{02ee1c5a-0453-a44d-2bff-1a0f009b3a28}">
           <p14:sldIdLst>
             <p14:sldId id="256"/>
             <p14:sldId id="257"/>
           </p14:sldIdLst>
         </p14:section>
-        <p14:section name="개념" id="{a94dedf2-e79f-dc1c-e55a-5d0044ad2c1d}">
+        <p14:section name="개념" id="{7ddc156e-1c40-03ef-cb5b-b16244ae6774}">
           <p14:sldIdLst>
             <p14:sldId id="258"/>
             <p14:sldId id="259"/>
@@ -137,25 +137,25 @@
             <p14:sldId id="263"/>
           </p14:sldIdLst>
         </p14:section>
-        <p14:section name="연습" id="{05a9ae44-4cd1-3f07-5922-74c487b7e0ec}">
+        <p14:section name="연습" id="{0ad5d750-4a1b-410b-849c-47775411de9f}">
           <p14:sldIdLst>
             <p14:sldId id="264"/>
             <p14:sldId id="265"/>
           </p14:sldIdLst>
         </p14:section>
-        <p14:section name="확인" id="{bda4fac3-d3e0-e225-0d0e-d235b9abd9f3}">
+        <p14:section name="확인" id="{fe49a4c9-bc70-5550-a953-7fb0229241f9}">
           <p14:sldIdLst>
             <p14:sldId id="266"/>
             <p14:sldId id="267"/>
             <p14:sldId id="268"/>
           </p14:sldIdLst>
         </p14:section>
-        <p14:section name="정리" id="{84949ad1-991c-39ba-b844-6f49829cec73}">
+        <p14:section name="정리" id="{eeb4a631-7ecf-70b3-837b-187587a33e29}">
           <p14:sldIdLst>
             <p14:sldId id="269"/>
           </p14:sldIdLst>
         </p14:section>
-        <p14:section name="보충" id="{8d335df7-466f-ff5c-ed4e-20b5dc6bfc19}">
+        <p14:section name="보충" id="{744d7d78-5405-9105-3f1f-d0e7e58dafca}">
           <p14:sldIdLst>
             <p14:sldId id="270"/>
           </p14:sldIdLst>

--- a/dist/초2/수학/수와계산/초2_수학_수와계산_08_3단과6단.pptx
+++ b/dist/초2/수학/수와계산/초2_수학_수와계산_08_3단과6단.pptx
@@ -121,13 +121,13 @@
   <p:extLst>
     <p:ext uri="{521415D9-36F7-43E2-AB2F-B90AF26B5E84}">
       <p14:sectionLst xmlns:p14="http://schemas.microsoft.com/office/powerpoint/2010/main">
-        <p14:section name="도입" id="{02ee1c5a-0453-a44d-2bff-1a0f009b3a28}">
+        <p14:section name="도입" id="{b886705a-a7b7-252b-f38c-bfe3ec9a7de5}">
           <p14:sldIdLst>
             <p14:sldId id="256"/>
             <p14:sldId id="257"/>
           </p14:sldIdLst>
         </p14:section>
-        <p14:section name="개념" id="{7ddc156e-1c40-03ef-cb5b-b16244ae6774}">
+        <p14:section name="개념" id="{10b44d6b-336b-0ba1-878f-27f64379720c}">
           <p14:sldIdLst>
             <p14:sldId id="258"/>
             <p14:sldId id="259"/>
@@ -137,25 +137,25 @@
             <p14:sldId id="263"/>
           </p14:sldIdLst>
         </p14:section>
-        <p14:section name="연습" id="{0ad5d750-4a1b-410b-849c-47775411de9f}">
+        <p14:section name="연습" id="{96969c26-bfd7-324c-b9db-891e8c3984f6}">
           <p14:sldIdLst>
             <p14:sldId id="264"/>
             <p14:sldId id="265"/>
           </p14:sldIdLst>
         </p14:section>
-        <p14:section name="확인" id="{fe49a4c9-bc70-5550-a953-7fb0229241f9}">
+        <p14:section name="확인" id="{d75fe49d-3f8a-6a56-07d4-2d91a8caf1ed}">
           <p14:sldIdLst>
             <p14:sldId id="266"/>
             <p14:sldId id="267"/>
             <p14:sldId id="268"/>
           </p14:sldIdLst>
         </p14:section>
-        <p14:section name="정리" id="{eeb4a631-7ecf-70b3-837b-187587a33e29}">
+        <p14:section name="정리" id="{09909b23-ffa0-7bfd-6d69-c904730c919f}">
           <p14:sldIdLst>
             <p14:sldId id="269"/>
           </p14:sldIdLst>
         </p14:section>
-        <p14:section name="보충" id="{744d7d78-5405-9105-3f1f-d0e7e58dafca}">
+        <p14:section name="보충" id="{29e50bbb-34a7-146a-065d-a1d5dc294b0c}">
           <p14:sldIdLst>
             <p14:sldId id="270"/>
           </p14:sldIdLst>
@@ -13381,7 +13381,7 @@
           </p:nvPr>
         </p:nvGraphicFramePr>
         <p:xfrm>
-          <a:off x="548640" y="3037840"/>
+          <a:off x="548640" y="3054350"/>
           <a:ext cx="11091672" cy="914400"/>
         </p:xfrm>
         <a:graphic>
@@ -13399,7 +13399,7 @@
                 <a:gridCol w="1232408"/>
                 <a:gridCol w="1232408"/>
               </a:tblGrid>
-              <a:tr h="528320">
+              <a:tr h="511810">
                 <a:tc>
                   <a:txBody>
                     <a:bodyPr/>
@@ -14013,7 +14013,7 @@
                   </a:tcPr>
                 </a:tc>
               </a:tr>
-              <a:tr h="528320">
+              <a:tr h="511810">
                 <a:tc>
                   <a:txBody>
                     <a:bodyPr/>
@@ -18233,7 +18233,7 @@
           </p:nvPr>
         </p:nvGraphicFramePr>
         <p:xfrm>
-          <a:off x="548640" y="2773680"/>
+          <a:off x="548640" y="2798445"/>
           <a:ext cx="11091672" cy="914400"/>
         </p:xfrm>
         <a:graphic>
@@ -18252,7 +18252,7 @@
                 <a:gridCol w="1109167"/>
                 <a:gridCol w="1109167"/>
               </a:tblGrid>
-              <a:tr h="528320">
+              <a:tr h="511810">
                 <a:tc>
                   <a:txBody>
                     <a:bodyPr/>
@@ -18934,7 +18934,7 @@
                   </a:tcPr>
                 </a:tc>
               </a:tr>
-              <a:tr h="528320">
+              <a:tr h="511810">
                 <a:tc>
                   <a:txBody>
                     <a:bodyPr/>
@@ -19616,7 +19616,7 @@
                   </a:tcPr>
                 </a:tc>
               </a:tr>
-              <a:tr h="528320">
+              <a:tr h="511810">
                 <a:tc>
                   <a:txBody>
                     <a:bodyPr/>
